--- a/proposals/機種分析/炎炎ノ消防隊2/enenno_guide_v2.pptx
+++ b/proposals/機種分析/炎炎ノ消防隊2/enenno_guide_v2.pptx
@@ -3362,8 +3362,8 @@
         </p:nvSpPr>
         <p:spPr>
           <a:xfrm>
-            <a:off x="201168" y="2788920"/>
-            <a:ext cx="1554480" cy="210000"/>
+            <a:off x="201168" y="2606040"/>
+            <a:ext cx="1554480" cy="185000"/>
           </a:xfrm>
           <a:prstGeom prst="rect">
             <a:avLst/>
@@ -3378,7 +3378,7 @@
           <a:p>
             <a:pPr algn="l"/>
             <a:r>
-              <a:rPr sz="750" b="0">
+              <a:rPr sz="700" b="0">
                 <a:solidFill>
                   <a:srgbClr val="998880"/>
                 </a:solidFill>
@@ -3397,8 +3397,8 @@
         </p:nvSpPr>
         <p:spPr>
           <a:xfrm>
-            <a:off x="1755648" y="2788920"/>
-            <a:ext cx="3017520" cy="210000"/>
+            <a:off x="1755648" y="2606040"/>
+            <a:ext cx="3017520" cy="185000"/>
           </a:xfrm>
           <a:prstGeom prst="rect">
             <a:avLst/>
@@ -3413,7 +3413,7 @@
           <a:p>
             <a:pPr algn="l"/>
             <a:r>
-              <a:rPr sz="750" b="1">
+              <a:rPr sz="700" b="1">
                 <a:solidFill>
                   <a:srgbClr val="F0ECE8"/>
                 </a:solidFill>
@@ -3432,8 +3432,8 @@
         </p:nvSpPr>
         <p:spPr>
           <a:xfrm>
-            <a:off x="201168" y="3013920"/>
-            <a:ext cx="1554480" cy="210000"/>
+            <a:off x="201168" y="2801040"/>
+            <a:ext cx="1554480" cy="185000"/>
           </a:xfrm>
           <a:prstGeom prst="rect">
             <a:avLst/>
@@ -3448,7 +3448,7 @@
           <a:p>
             <a:pPr algn="l"/>
             <a:r>
-              <a:rPr sz="750" b="0">
+              <a:rPr sz="700" b="0">
                 <a:solidFill>
                   <a:srgbClr val="998880"/>
                 </a:solidFill>
@@ -3467,8 +3467,8 @@
         </p:nvSpPr>
         <p:spPr>
           <a:xfrm>
-            <a:off x="1755648" y="3013920"/>
-            <a:ext cx="3017520" cy="210000"/>
+            <a:off x="1755648" y="2801040"/>
+            <a:ext cx="3017520" cy="185000"/>
           </a:xfrm>
           <a:prstGeom prst="rect">
             <a:avLst/>
@@ -3483,7 +3483,7 @@
           <a:p>
             <a:pPr algn="l"/>
             <a:r>
-              <a:rPr sz="750" b="1">
+              <a:rPr sz="700" b="1">
                 <a:solidFill>
                   <a:srgbClr val="F0ECE8"/>
                 </a:solidFill>
@@ -3502,8 +3502,8 @@
         </p:nvSpPr>
         <p:spPr>
           <a:xfrm>
-            <a:off x="201168" y="3238920"/>
-            <a:ext cx="1554480" cy="210000"/>
+            <a:off x="201168" y="2996040"/>
+            <a:ext cx="1554480" cy="185000"/>
           </a:xfrm>
           <a:prstGeom prst="rect">
             <a:avLst/>
@@ -3518,7 +3518,7 @@
           <a:p>
             <a:pPr algn="l"/>
             <a:r>
-              <a:rPr sz="750" b="0">
+              <a:rPr sz="700" b="0">
                 <a:solidFill>
                   <a:srgbClr val="998880"/>
                 </a:solidFill>
@@ -3537,8 +3537,8 @@
         </p:nvSpPr>
         <p:spPr>
           <a:xfrm>
-            <a:off x="1755648" y="3238920"/>
-            <a:ext cx="3017520" cy="210000"/>
+            <a:off x="1755648" y="2996040"/>
+            <a:ext cx="3017520" cy="185000"/>
           </a:xfrm>
           <a:prstGeom prst="rect">
             <a:avLst/>
@@ -3553,7 +3553,7 @@
           <a:p>
             <a:pPr algn="l"/>
             <a:r>
-              <a:rPr sz="750" b="1">
+              <a:rPr sz="700" b="1">
                 <a:solidFill>
                   <a:srgbClr val="F0ECE8"/>
                 </a:solidFill>
@@ -3572,8 +3572,8 @@
         </p:nvSpPr>
         <p:spPr>
           <a:xfrm>
-            <a:off x="201168" y="3463920"/>
-            <a:ext cx="1554480" cy="210000"/>
+            <a:off x="201168" y="3191040"/>
+            <a:ext cx="1554480" cy="185000"/>
           </a:xfrm>
           <a:prstGeom prst="rect">
             <a:avLst/>
@@ -3588,7 +3588,7 @@
           <a:p>
             <a:pPr algn="l"/>
             <a:r>
-              <a:rPr sz="750" b="0">
+              <a:rPr sz="700" b="0">
                 <a:solidFill>
                   <a:srgbClr val="998880"/>
                 </a:solidFill>
@@ -3607,8 +3607,8 @@
         </p:nvSpPr>
         <p:spPr>
           <a:xfrm>
-            <a:off x="1755648" y="3463920"/>
-            <a:ext cx="3017520" cy="210000"/>
+            <a:off x="1755648" y="3191040"/>
+            <a:ext cx="3017520" cy="185000"/>
           </a:xfrm>
           <a:prstGeom prst="rect">
             <a:avLst/>
@@ -3623,7 +3623,7 @@
           <a:p>
             <a:pPr algn="l"/>
             <a:r>
-              <a:rPr sz="750" b="1">
+              <a:rPr sz="700" b="1">
                 <a:solidFill>
                   <a:srgbClr val="F0ECE8"/>
                 </a:solidFill>
@@ -3642,8 +3642,8 @@
         </p:nvSpPr>
         <p:spPr>
           <a:xfrm>
-            <a:off x="201168" y="3688920"/>
-            <a:ext cx="1554480" cy="210000"/>
+            <a:off x="201168" y="3386040"/>
+            <a:ext cx="1554480" cy="185000"/>
           </a:xfrm>
           <a:prstGeom prst="rect">
             <a:avLst/>
@@ -3658,7 +3658,7 @@
           <a:p>
             <a:pPr algn="l"/>
             <a:r>
-              <a:rPr sz="750" b="0">
+              <a:rPr sz="700" b="0">
                 <a:solidFill>
                   <a:srgbClr val="998880"/>
                 </a:solidFill>
@@ -3677,8 +3677,8 @@
         </p:nvSpPr>
         <p:spPr>
           <a:xfrm>
-            <a:off x="1755648" y="3688920"/>
-            <a:ext cx="3017520" cy="210000"/>
+            <a:off x="1755648" y="3386040"/>
+            <a:ext cx="3017520" cy="185000"/>
           </a:xfrm>
           <a:prstGeom prst="rect">
             <a:avLst/>
@@ -3693,7 +3693,7 @@
           <a:p>
             <a:pPr algn="l"/>
             <a:r>
-              <a:rPr sz="750" b="1">
+              <a:rPr sz="700" b="1">
                 <a:solidFill>
                   <a:srgbClr val="F0ECE8"/>
                 </a:solidFill>
@@ -3712,8 +3712,8 @@
         </p:nvSpPr>
         <p:spPr>
           <a:xfrm>
-            <a:off x="201168" y="3913920"/>
-            <a:ext cx="1554480" cy="210000"/>
+            <a:off x="201168" y="3581040"/>
+            <a:ext cx="1554480" cy="185000"/>
           </a:xfrm>
           <a:prstGeom prst="rect">
             <a:avLst/>
@@ -3728,7 +3728,7 @@
           <a:p>
             <a:pPr algn="l"/>
             <a:r>
-              <a:rPr sz="750" b="0">
+              <a:rPr sz="700" b="0">
                 <a:solidFill>
                   <a:srgbClr val="998880"/>
                 </a:solidFill>
@@ -3747,8 +3747,8 @@
         </p:nvSpPr>
         <p:spPr>
           <a:xfrm>
-            <a:off x="1755648" y="3913920"/>
-            <a:ext cx="3017520" cy="210000"/>
+            <a:off x="1755648" y="3581040"/>
+            <a:ext cx="3017520" cy="185000"/>
           </a:xfrm>
           <a:prstGeom prst="rect">
             <a:avLst/>
@@ -3763,7 +3763,7 @@
           <a:p>
             <a:pPr algn="l"/>
             <a:r>
-              <a:rPr sz="750" b="1">
+              <a:rPr sz="700" b="1">
                 <a:solidFill>
                   <a:srgbClr val="F0ECE8"/>
                 </a:solidFill>
@@ -3782,8 +3782,8 @@
         </p:nvSpPr>
         <p:spPr>
           <a:xfrm>
-            <a:off x="201168" y="4138920"/>
-            <a:ext cx="1554480" cy="210000"/>
+            <a:off x="201168" y="3776040"/>
+            <a:ext cx="1554480" cy="185000"/>
           </a:xfrm>
           <a:prstGeom prst="rect">
             <a:avLst/>
@@ -3798,7 +3798,7 @@
           <a:p>
             <a:pPr algn="l"/>
             <a:r>
-              <a:rPr sz="750" b="0">
+              <a:rPr sz="700" b="0">
                 <a:solidFill>
                   <a:srgbClr val="998880"/>
                 </a:solidFill>
@@ -3817,8 +3817,8 @@
         </p:nvSpPr>
         <p:spPr>
           <a:xfrm>
-            <a:off x="1755648" y="4138920"/>
-            <a:ext cx="3017520" cy="210000"/>
+            <a:off x="1755648" y="3776040"/>
+            <a:ext cx="3017520" cy="185000"/>
           </a:xfrm>
           <a:prstGeom prst="rect">
             <a:avLst/>
@@ -3833,7 +3833,7 @@
           <a:p>
             <a:pPr algn="l"/>
             <a:r>
-              <a:rPr sz="750" b="1">
+              <a:rPr sz="700" b="1">
                 <a:solidFill>
                   <a:srgbClr val="F0ECE8"/>
                 </a:solidFill>
@@ -3852,8 +3852,8 @@
         </p:nvSpPr>
         <p:spPr>
           <a:xfrm>
-            <a:off x="201168" y="4363920"/>
-            <a:ext cx="1554480" cy="210000"/>
+            <a:off x="201168" y="3971040"/>
+            <a:ext cx="1554480" cy="185000"/>
           </a:xfrm>
           <a:prstGeom prst="rect">
             <a:avLst/>
@@ -3868,7 +3868,7 @@
           <a:p>
             <a:pPr algn="l"/>
             <a:r>
-              <a:rPr sz="750" b="0">
+              <a:rPr sz="700" b="0">
                 <a:solidFill>
                   <a:srgbClr val="998880"/>
                 </a:solidFill>
@@ -3887,8 +3887,8 @@
         </p:nvSpPr>
         <p:spPr>
           <a:xfrm>
-            <a:off x="1755648" y="4363920"/>
-            <a:ext cx="3017520" cy="210000"/>
+            <a:off x="1755648" y="3971040"/>
+            <a:ext cx="3017520" cy="185000"/>
           </a:xfrm>
           <a:prstGeom prst="rect">
             <a:avLst/>
@@ -3903,7 +3903,7 @@
           <a:p>
             <a:pPr algn="l"/>
             <a:r>
-              <a:rPr sz="750" b="1">
+              <a:rPr sz="700" b="1">
                 <a:solidFill>
                   <a:srgbClr val="F0ECE8"/>
                 </a:solidFill>
@@ -3922,8 +3922,8 @@
         </p:nvSpPr>
         <p:spPr>
           <a:xfrm>
-            <a:off x="201168" y="4588920"/>
-            <a:ext cx="1554480" cy="210000"/>
+            <a:off x="201168" y="4166040"/>
+            <a:ext cx="1554480" cy="185000"/>
           </a:xfrm>
           <a:prstGeom prst="rect">
             <a:avLst/>
@@ -3938,7 +3938,7 @@
           <a:p>
             <a:pPr algn="l"/>
             <a:r>
-              <a:rPr sz="750" b="0">
+              <a:rPr sz="700" b="0">
                 <a:solidFill>
                   <a:srgbClr val="998880"/>
                 </a:solidFill>
@@ -3957,8 +3957,8 @@
         </p:nvSpPr>
         <p:spPr>
           <a:xfrm>
-            <a:off x="1755648" y="4588920"/>
-            <a:ext cx="3017520" cy="210000"/>
+            <a:off x="1755648" y="4166040"/>
+            <a:ext cx="3017520" cy="185000"/>
           </a:xfrm>
           <a:prstGeom prst="rect">
             <a:avLst/>
@@ -3973,7 +3973,7 @@
           <a:p>
             <a:pPr algn="l"/>
             <a:r>
-              <a:rPr sz="750" b="1">
+              <a:rPr sz="700" b="1">
                 <a:solidFill>
                   <a:srgbClr val="F0ECE8"/>
                 </a:solidFill>
@@ -3992,8 +3992,8 @@
         </p:nvSpPr>
         <p:spPr>
           <a:xfrm>
-            <a:off x="201168" y="4813920"/>
-            <a:ext cx="1554480" cy="210000"/>
+            <a:off x="201168" y="4361040"/>
+            <a:ext cx="1554480" cy="185000"/>
           </a:xfrm>
           <a:prstGeom prst="rect">
             <a:avLst/>
@@ -4008,7 +4008,7 @@
           <a:p>
             <a:pPr algn="l"/>
             <a:r>
-              <a:rPr sz="750" b="0">
+              <a:rPr sz="700" b="0">
                 <a:solidFill>
                   <a:srgbClr val="998880"/>
                 </a:solidFill>
@@ -4027,8 +4027,8 @@
         </p:nvSpPr>
         <p:spPr>
           <a:xfrm>
-            <a:off x="1755648" y="4813920"/>
-            <a:ext cx="3017520" cy="210000"/>
+            <a:off x="1755648" y="4361040"/>
+            <a:ext cx="3017520" cy="185000"/>
           </a:xfrm>
           <a:prstGeom prst="rect">
             <a:avLst/>
@@ -4043,7 +4043,7 @@
           <a:p>
             <a:pPr algn="l"/>
             <a:r>
-              <a:rPr sz="750" b="1">
+              <a:rPr sz="700" b="1">
                 <a:solidFill>
                   <a:srgbClr val="F0ECE8"/>
                 </a:solidFill>
@@ -4222,7 +4222,7 @@
         </p:nvSpPr>
         <p:spPr>
           <a:xfrm>
-            <a:off x="5166360" y="2042920"/>
+            <a:off x="5166360" y="1964520"/>
             <a:ext cx="3749039" cy="1188720"/>
           </a:xfrm>
           <a:prstGeom prst="rect">
@@ -4267,7 +4267,7 @@
         </p:nvSpPr>
         <p:spPr>
           <a:xfrm>
-            <a:off x="5166360" y="2042920"/>
+            <a:off x="5166360" y="1964520"/>
             <a:ext cx="60000" cy="1188720"/>
           </a:xfrm>
           <a:prstGeom prst="rect">
@@ -4310,7 +4310,7 @@
         </p:nvSpPr>
         <p:spPr>
           <a:xfrm>
-            <a:off x="5349240" y="2107920"/>
+            <a:off x="5349240" y="2029520"/>
             <a:ext cx="3474720" cy="310000"/>
           </a:xfrm>
           <a:prstGeom prst="rect">
@@ -4345,7 +4345,7 @@
         </p:nvSpPr>
         <p:spPr>
           <a:xfrm>
-            <a:off x="5349240" y="2422920"/>
+            <a:off x="5349240" y="2344520"/>
             <a:ext cx="3474720" cy="450000"/>
           </a:xfrm>
           <a:prstGeom prst="rect">
@@ -4382,7 +4382,7 @@
         </p:nvSpPr>
         <p:spPr>
           <a:xfrm>
-            <a:off x="5166360" y="3582920"/>
+            <a:off x="5166360" y="3426120"/>
             <a:ext cx="3749039" cy="1188720"/>
           </a:xfrm>
           <a:prstGeom prst="rect">
@@ -4427,7 +4427,7 @@
         </p:nvSpPr>
         <p:spPr>
           <a:xfrm>
-            <a:off x="5166360" y="3582920"/>
+            <a:off x="5166360" y="3426120"/>
             <a:ext cx="60000" cy="1188720"/>
           </a:xfrm>
           <a:prstGeom prst="rect">
@@ -4470,7 +4470,7 @@
         </p:nvSpPr>
         <p:spPr>
           <a:xfrm>
-            <a:off x="5349240" y="3647920"/>
+            <a:off x="5349240" y="3491120"/>
             <a:ext cx="3474720" cy="310000"/>
           </a:xfrm>
           <a:prstGeom prst="rect">
@@ -4505,7 +4505,7 @@
         </p:nvSpPr>
         <p:spPr>
           <a:xfrm>
-            <a:off x="5349240" y="3962920"/>
+            <a:off x="5349240" y="3806120"/>
             <a:ext cx="3474720" cy="450000"/>
           </a:xfrm>
           <a:prstGeom prst="rect">
@@ -4974,8 +4974,8 @@
         </p:nvSpPr>
         <p:spPr>
           <a:xfrm>
-            <a:off x="256032" y="685800"/>
-            <a:ext cx="1463040" cy="1100000"/>
+            <a:off x="274320" y="685800"/>
+            <a:ext cx="1508760" cy="1100000"/>
           </a:xfrm>
           <a:prstGeom prst="rect">
             <a:avLst/>
@@ -5019,8 +5019,8 @@
         </p:nvSpPr>
         <p:spPr>
           <a:xfrm>
-            <a:off x="291032" y="755800"/>
-            <a:ext cx="1403040" cy="360000"/>
+            <a:off x="309320" y="755800"/>
+            <a:ext cx="1448760" cy="360000"/>
           </a:xfrm>
           <a:prstGeom prst="rect">
             <a:avLst/>
@@ -5054,8 +5054,8 @@
         </p:nvSpPr>
         <p:spPr>
           <a:xfrm>
-            <a:off x="281032" y="1165800"/>
-            <a:ext cx="1418040" cy="520000"/>
+            <a:off x="299320" y="1165800"/>
+            <a:ext cx="1463760" cy="520000"/>
           </a:xfrm>
           <a:prstGeom prst="rect">
             <a:avLst/>
@@ -5091,7 +5091,7 @@
         </p:nvSpPr>
         <p:spPr>
           <a:xfrm>
-            <a:off x="1729072" y="1145800"/>
+            <a:off x="1793080" y="1145800"/>
             <a:ext cx="200000" cy="180000"/>
           </a:xfrm>
           <a:prstGeom prst="can">
@@ -5134,8 +5134,8 @@
         </p:nvSpPr>
         <p:spPr>
           <a:xfrm>
-            <a:off x="1874520" y="685800"/>
-            <a:ext cx="1463040" cy="1100000"/>
+            <a:off x="1938528" y="685800"/>
+            <a:ext cx="1508760" cy="1100000"/>
           </a:xfrm>
           <a:prstGeom prst="rect">
             <a:avLst/>
@@ -5179,8 +5179,8 @@
         </p:nvSpPr>
         <p:spPr>
           <a:xfrm>
-            <a:off x="1909520" y="755800"/>
-            <a:ext cx="1403040" cy="360000"/>
+            <a:off x="1973528" y="755800"/>
+            <a:ext cx="1448760" cy="360000"/>
           </a:xfrm>
           <a:prstGeom prst="rect">
             <a:avLst/>
@@ -5215,8 +5215,8 @@
         </p:nvSpPr>
         <p:spPr>
           <a:xfrm>
-            <a:off x="1899520" y="1165800"/>
-            <a:ext cx="1418040" cy="520000"/>
+            <a:off x="1963528" y="1165800"/>
+            <a:ext cx="1463760" cy="520000"/>
           </a:xfrm>
           <a:prstGeom prst="rect">
             <a:avLst/>
@@ -5251,7 +5251,7 @@
         </p:nvSpPr>
         <p:spPr>
           <a:xfrm>
-            <a:off x="3347560" y="1145800"/>
+            <a:off x="3457288" y="1145800"/>
             <a:ext cx="200000" cy="180000"/>
           </a:xfrm>
           <a:prstGeom prst="can">
@@ -5294,8 +5294,8 @@
         </p:nvSpPr>
         <p:spPr>
           <a:xfrm>
-            <a:off x="3493008" y="685800"/>
-            <a:ext cx="1463040" cy="1100000"/>
+            <a:off x="3602736" y="685800"/>
+            <a:ext cx="1508760" cy="1100000"/>
           </a:xfrm>
           <a:prstGeom prst="rect">
             <a:avLst/>
@@ -5339,8 +5339,8 @@
         </p:nvSpPr>
         <p:spPr>
           <a:xfrm>
-            <a:off x="3528008" y="755800"/>
-            <a:ext cx="1403040" cy="360000"/>
+            <a:off x="3637736" y="755800"/>
+            <a:ext cx="1448760" cy="360000"/>
           </a:xfrm>
           <a:prstGeom prst="rect">
             <a:avLst/>
@@ -5374,8 +5374,8 @@
         </p:nvSpPr>
         <p:spPr>
           <a:xfrm>
-            <a:off x="3518008" y="1165800"/>
-            <a:ext cx="1418040" cy="520000"/>
+            <a:off x="3627736" y="1165800"/>
+            <a:ext cx="1463760" cy="520000"/>
           </a:xfrm>
           <a:prstGeom prst="rect">
             <a:avLst/>
@@ -5411,7 +5411,7 @@
         </p:nvSpPr>
         <p:spPr>
           <a:xfrm>
-            <a:off x="4966048" y="1145800"/>
+            <a:off x="5121496" y="1145800"/>
             <a:ext cx="200000" cy="180000"/>
           </a:xfrm>
           <a:prstGeom prst="can">
@@ -5454,8 +5454,8 @@
         </p:nvSpPr>
         <p:spPr>
           <a:xfrm>
-            <a:off x="5111496" y="685800"/>
-            <a:ext cx="1463040" cy="1100000"/>
+            <a:off x="5266944" y="685800"/>
+            <a:ext cx="1508760" cy="1100000"/>
           </a:xfrm>
           <a:prstGeom prst="rect">
             <a:avLst/>
@@ -5499,8 +5499,8 @@
         </p:nvSpPr>
         <p:spPr>
           <a:xfrm>
-            <a:off x="5146496" y="755800"/>
-            <a:ext cx="1403040" cy="360000"/>
+            <a:off x="5301944" y="755800"/>
+            <a:ext cx="1448760" cy="360000"/>
           </a:xfrm>
           <a:prstGeom prst="rect">
             <a:avLst/>
@@ -5535,8 +5535,8 @@
         </p:nvSpPr>
         <p:spPr>
           <a:xfrm>
-            <a:off x="5136496" y="1165800"/>
-            <a:ext cx="1418040" cy="520000"/>
+            <a:off x="5291944" y="1165800"/>
+            <a:ext cx="1463760" cy="520000"/>
           </a:xfrm>
           <a:prstGeom prst="rect">
             <a:avLst/>
@@ -5571,7 +5571,7 @@
         </p:nvSpPr>
         <p:spPr>
           <a:xfrm>
-            <a:off x="6584536" y="1145800"/>
+            <a:off x="6785704" y="1145800"/>
             <a:ext cx="200000" cy="180000"/>
           </a:xfrm>
           <a:prstGeom prst="can">
@@ -5614,8 +5614,8 @@
         </p:nvSpPr>
         <p:spPr>
           <a:xfrm>
-            <a:off x="6729984" y="685800"/>
-            <a:ext cx="1463040" cy="1100000"/>
+            <a:off x="6931152" y="685800"/>
+            <a:ext cx="1508760" cy="1100000"/>
           </a:xfrm>
           <a:prstGeom prst="rect">
             <a:avLst/>
@@ -5659,8 +5659,8 @@
         </p:nvSpPr>
         <p:spPr>
           <a:xfrm>
-            <a:off x="6764984" y="755800"/>
-            <a:ext cx="1403040" cy="360000"/>
+            <a:off x="6966152" y="755800"/>
+            <a:ext cx="1448760" cy="360000"/>
           </a:xfrm>
           <a:prstGeom prst="rect">
             <a:avLst/>
@@ -5695,8 +5695,8 @@
         </p:nvSpPr>
         <p:spPr>
           <a:xfrm>
-            <a:off x="6754984" y="1165800"/>
-            <a:ext cx="1418040" cy="520000"/>
+            <a:off x="6956152" y="1165800"/>
+            <a:ext cx="1463760" cy="520000"/>
           </a:xfrm>
           <a:prstGeom prst="rect">
             <a:avLst/>
@@ -5731,7 +5731,7 @@
         </p:nvSpPr>
         <p:spPr>
           <a:xfrm>
-            <a:off x="256032" y="1805800"/>
+            <a:off x="274320" y="1805800"/>
             <a:ext cx="2743200" cy="260000"/>
           </a:xfrm>
           <a:prstGeom prst="rect">
@@ -5766,7 +5766,7 @@
         </p:nvSpPr>
         <p:spPr>
           <a:xfrm>
-            <a:off x="256032" y="2045800"/>
+            <a:off x="274320" y="2045800"/>
             <a:ext cx="3200400" cy="5000"/>
           </a:xfrm>
           <a:prstGeom prst="rect">
@@ -5809,7 +5809,7 @@
         </p:nvSpPr>
         <p:spPr>
           <a:xfrm>
-            <a:off x="3547872" y="1805800"/>
+            <a:off x="3566160" y="1805800"/>
             <a:ext cx="3200400" cy="260000"/>
           </a:xfrm>
           <a:prstGeom prst="rect">
@@ -5887,8 +5887,8 @@
         </p:nvSpPr>
         <p:spPr>
           <a:xfrm>
-            <a:off x="256032" y="1993392"/>
-            <a:ext cx="1783080" cy="1080000"/>
+            <a:off x="274320" y="1993392"/>
+            <a:ext cx="1508760" cy="1080000"/>
           </a:xfrm>
           <a:prstGeom prst="rect">
             <a:avLst/>
@@ -5932,23 +5932,23 @@
         </p:nvSpPr>
         <p:spPr>
           <a:xfrm>
-            <a:off x="296032" y="2063392"/>
-            <a:ext cx="1713080" cy="370000"/>
-          </a:xfrm>
-          <a:prstGeom prst="rect">
-            <a:avLst/>
-          </a:prstGeom>
-          <a:noFill/>
-        </p:spPr>
-        <p:txBody>
-          <a:bodyPr wrap="square">
-            <a:spAutoFit/>
-          </a:bodyPr>
-          <a:lstStyle/>
-          <a:p>
-            <a:pPr algn="ctr"/>
-            <a:r>
-              <a:rPr sz="1000" b="1">
+            <a:off x="309320" y="2063392"/>
+            <a:ext cx="1448760" cy="370000"/>
+          </a:xfrm>
+          <a:prstGeom prst="rect">
+            <a:avLst/>
+          </a:prstGeom>
+          <a:noFill/>
+        </p:spPr>
+        <p:txBody>
+          <a:bodyPr wrap="square">
+            <a:spAutoFit/>
+          </a:bodyPr>
+          <a:lstStyle/>
+          <a:p>
+            <a:pPr algn="ctr"/>
+            <a:r>
+              <a:rPr sz="950" b="1">
                 <a:solidFill>
                   <a:srgbClr val="FF6611"/>
                 </a:solidFill>
@@ -5968,23 +5968,23 @@
         </p:nvSpPr>
         <p:spPr>
           <a:xfrm>
-            <a:off x="286032" y="2483392"/>
-            <a:ext cx="1728080" cy="470000"/>
-          </a:xfrm>
-          <a:prstGeom prst="rect">
-            <a:avLst/>
-          </a:prstGeom>
-          <a:noFill/>
-        </p:spPr>
-        <p:txBody>
-          <a:bodyPr wrap="square">
-            <a:spAutoFit/>
-          </a:bodyPr>
-          <a:lstStyle/>
-          <a:p>
-            <a:pPr algn="ctr"/>
-            <a:r>
-              <a:rPr sz="800" b="0">
+            <a:off x="299320" y="2483392"/>
+            <a:ext cx="1463760" cy="470000"/>
+          </a:xfrm>
+          <a:prstGeom prst="rect">
+            <a:avLst/>
+          </a:prstGeom>
+          <a:noFill/>
+        </p:spPr>
+        <p:txBody>
+          <a:bodyPr wrap="square">
+            <a:spAutoFit/>
+          </a:bodyPr>
+          <a:lstStyle/>
+          <a:p>
+            <a:pPr algn="ctr"/>
+            <a:r>
+              <a:rPr sz="750" b="0">
                 <a:solidFill>
                   <a:srgbClr val="998880"/>
                 </a:solidFill>
@@ -6004,7 +6004,7 @@
         </p:nvSpPr>
         <p:spPr>
           <a:xfrm>
-            <a:off x="2051112" y="2443392"/>
+            <a:off x="1793080" y="2443392"/>
             <a:ext cx="200000" cy="180000"/>
           </a:xfrm>
           <a:prstGeom prst="can">
@@ -6047,8 +6047,8 @@
         </p:nvSpPr>
         <p:spPr>
           <a:xfrm>
-            <a:off x="2240280" y="1993392"/>
-            <a:ext cx="1783080" cy="1080000"/>
+            <a:off x="1938528" y="1993392"/>
+            <a:ext cx="1508760" cy="1080000"/>
           </a:xfrm>
           <a:prstGeom prst="rect">
             <a:avLst/>
@@ -6092,23 +6092,23 @@
         </p:nvSpPr>
         <p:spPr>
           <a:xfrm>
-            <a:off x="2280280" y="2063392"/>
-            <a:ext cx="1713080" cy="370000"/>
-          </a:xfrm>
-          <a:prstGeom prst="rect">
-            <a:avLst/>
-          </a:prstGeom>
-          <a:noFill/>
-        </p:spPr>
-        <p:txBody>
-          <a:bodyPr wrap="square">
-            <a:spAutoFit/>
-          </a:bodyPr>
-          <a:lstStyle/>
-          <a:p>
-            <a:pPr algn="ctr"/>
-            <a:r>
-              <a:rPr sz="1000" b="1">
+            <a:off x="1973528" y="2063392"/>
+            <a:ext cx="1448760" cy="370000"/>
+          </a:xfrm>
+          <a:prstGeom prst="rect">
+            <a:avLst/>
+          </a:prstGeom>
+          <a:noFill/>
+        </p:spPr>
+        <p:txBody>
+          <a:bodyPr wrap="square">
+            <a:spAutoFit/>
+          </a:bodyPr>
+          <a:lstStyle/>
+          <a:p>
+            <a:pPr algn="ctr"/>
+            <a:r>
+              <a:rPr sz="950" b="1">
                 <a:solidFill>
                   <a:srgbClr val="FF8800"/>
                 </a:solidFill>
@@ -6128,23 +6128,23 @@
         </p:nvSpPr>
         <p:spPr>
           <a:xfrm>
-            <a:off x="2270280" y="2483392"/>
-            <a:ext cx="1728080" cy="470000"/>
-          </a:xfrm>
-          <a:prstGeom prst="rect">
-            <a:avLst/>
-          </a:prstGeom>
-          <a:noFill/>
-        </p:spPr>
-        <p:txBody>
-          <a:bodyPr wrap="square">
-            <a:spAutoFit/>
-          </a:bodyPr>
-          <a:lstStyle/>
-          <a:p>
-            <a:pPr algn="ctr"/>
-            <a:r>
-              <a:rPr sz="800" b="0">
+            <a:off x="1963528" y="2483392"/>
+            <a:ext cx="1463760" cy="470000"/>
+          </a:xfrm>
+          <a:prstGeom prst="rect">
+            <a:avLst/>
+          </a:prstGeom>
+          <a:noFill/>
+        </p:spPr>
+        <p:txBody>
+          <a:bodyPr wrap="square">
+            <a:spAutoFit/>
+          </a:bodyPr>
+          <a:lstStyle/>
+          <a:p>
+            <a:pPr algn="ctr"/>
+            <a:r>
+              <a:rPr sz="750" b="0">
                 <a:solidFill>
                   <a:srgbClr val="998880"/>
                 </a:solidFill>
@@ -6164,7 +6164,7 @@
         </p:nvSpPr>
         <p:spPr>
           <a:xfrm>
-            <a:off x="4035360" y="2443392"/>
+            <a:off x="3457288" y="2443392"/>
             <a:ext cx="200000" cy="180000"/>
           </a:xfrm>
           <a:prstGeom prst="can">
@@ -6207,8 +6207,8 @@
         </p:nvSpPr>
         <p:spPr>
           <a:xfrm>
-            <a:off x="4224528" y="1993392"/>
-            <a:ext cx="1783080" cy="1080000"/>
+            <a:off x="3602736" y="1993392"/>
+            <a:ext cx="1508760" cy="1080000"/>
           </a:xfrm>
           <a:prstGeom prst="rect">
             <a:avLst/>
@@ -6252,23 +6252,23 @@
         </p:nvSpPr>
         <p:spPr>
           <a:xfrm>
-            <a:off x="4264528" y="2063392"/>
-            <a:ext cx="1713080" cy="370000"/>
-          </a:xfrm>
-          <a:prstGeom prst="rect">
-            <a:avLst/>
-          </a:prstGeom>
-          <a:noFill/>
-        </p:spPr>
-        <p:txBody>
-          <a:bodyPr wrap="square">
-            <a:spAutoFit/>
-          </a:bodyPr>
-          <a:lstStyle/>
-          <a:p>
-            <a:pPr algn="ctr"/>
-            <a:r>
-              <a:rPr sz="1000" b="1">
+            <a:off x="3637736" y="2063392"/>
+            <a:ext cx="1448760" cy="370000"/>
+          </a:xfrm>
+          <a:prstGeom prst="rect">
+            <a:avLst/>
+          </a:prstGeom>
+          <a:noFill/>
+        </p:spPr>
+        <p:txBody>
+          <a:bodyPr wrap="square">
+            <a:spAutoFit/>
+          </a:bodyPr>
+          <a:lstStyle/>
+          <a:p>
+            <a:pPr algn="ctr"/>
+            <a:r>
+              <a:rPr sz="950" b="1">
                 <a:solidFill>
                   <a:srgbClr val="FF4488"/>
                 </a:solidFill>
@@ -6288,23 +6288,23 @@
         </p:nvSpPr>
         <p:spPr>
           <a:xfrm>
-            <a:off x="4254528" y="2483392"/>
-            <a:ext cx="1728080" cy="470000"/>
-          </a:xfrm>
-          <a:prstGeom prst="rect">
-            <a:avLst/>
-          </a:prstGeom>
-          <a:noFill/>
-        </p:spPr>
-        <p:txBody>
-          <a:bodyPr wrap="square">
-            <a:spAutoFit/>
-          </a:bodyPr>
-          <a:lstStyle/>
-          <a:p>
-            <a:pPr algn="ctr"/>
-            <a:r>
-              <a:rPr sz="800" b="0">
+            <a:off x="3627736" y="2483392"/>
+            <a:ext cx="1463760" cy="470000"/>
+          </a:xfrm>
+          <a:prstGeom prst="rect">
+            <a:avLst/>
+          </a:prstGeom>
+          <a:noFill/>
+        </p:spPr>
+        <p:txBody>
+          <a:bodyPr wrap="square">
+            <a:spAutoFit/>
+          </a:bodyPr>
+          <a:lstStyle/>
+          <a:p>
+            <a:pPr algn="ctr"/>
+            <a:r>
+              <a:rPr sz="750" b="0">
                 <a:solidFill>
                   <a:srgbClr val="998880"/>
                 </a:solidFill>
@@ -6324,7 +6324,7 @@
         </p:nvSpPr>
         <p:spPr>
           <a:xfrm>
-            <a:off x="6019608" y="2443392"/>
+            <a:off x="5121496" y="2443392"/>
             <a:ext cx="200000" cy="180000"/>
           </a:xfrm>
           <a:prstGeom prst="can">
@@ -6367,8 +6367,8 @@
         </p:nvSpPr>
         <p:spPr>
           <a:xfrm>
-            <a:off x="6208776" y="1993392"/>
-            <a:ext cx="1783080" cy="1080000"/>
+            <a:off x="5266944" y="1993392"/>
+            <a:ext cx="1508760" cy="1080000"/>
           </a:xfrm>
           <a:prstGeom prst="rect">
             <a:avLst/>
@@ -6412,23 +6412,23 @@
         </p:nvSpPr>
         <p:spPr>
           <a:xfrm>
-            <a:off x="6248776" y="2063392"/>
-            <a:ext cx="1713080" cy="370000"/>
-          </a:xfrm>
-          <a:prstGeom prst="rect">
-            <a:avLst/>
-          </a:prstGeom>
-          <a:noFill/>
-        </p:spPr>
-        <p:txBody>
-          <a:bodyPr wrap="square">
-            <a:spAutoFit/>
-          </a:bodyPr>
-          <a:lstStyle/>
-          <a:p>
-            <a:pPr algn="ctr"/>
-            <a:r>
-              <a:rPr sz="1000" b="1">
+            <a:off x="5301944" y="2063392"/>
+            <a:ext cx="1448760" cy="370000"/>
+          </a:xfrm>
+          <a:prstGeom prst="rect">
+            <a:avLst/>
+          </a:prstGeom>
+          <a:noFill/>
+        </p:spPr>
+        <p:txBody>
+          <a:bodyPr wrap="square">
+            <a:spAutoFit/>
+          </a:bodyPr>
+          <a:lstStyle/>
+          <a:p>
+            <a:pPr algn="ctr"/>
+            <a:r>
+              <a:rPr sz="950" b="1">
                 <a:solidFill>
                   <a:srgbClr val="C8A840"/>
                 </a:solidFill>
@@ -6448,23 +6448,23 @@
         </p:nvSpPr>
         <p:spPr>
           <a:xfrm>
-            <a:off x="6238776" y="2483392"/>
-            <a:ext cx="1728080" cy="470000"/>
-          </a:xfrm>
-          <a:prstGeom prst="rect">
-            <a:avLst/>
-          </a:prstGeom>
-          <a:noFill/>
-        </p:spPr>
-        <p:txBody>
-          <a:bodyPr wrap="square">
-            <a:spAutoFit/>
-          </a:bodyPr>
-          <a:lstStyle/>
-          <a:p>
-            <a:pPr algn="ctr"/>
-            <a:r>
-              <a:rPr sz="800" b="0">
+            <a:off x="5291944" y="2483392"/>
+            <a:ext cx="1463760" cy="470000"/>
+          </a:xfrm>
+          <a:prstGeom prst="rect">
+            <a:avLst/>
+          </a:prstGeom>
+          <a:noFill/>
+        </p:spPr>
+        <p:txBody>
+          <a:bodyPr wrap="square">
+            <a:spAutoFit/>
+          </a:bodyPr>
+          <a:lstStyle/>
+          <a:p>
+            <a:pPr algn="ctr"/>
+            <a:r>
+              <a:rPr sz="750" b="0">
                 <a:solidFill>
                   <a:srgbClr val="998880"/>
                 </a:solidFill>
@@ -6478,25 +6478,23 @@
       </p:sp>
       <p:sp>
         <p:nvSpPr>
-          <p:cNvPr id="46" name="Rectangle 45"/>
+          <p:cNvPr id="46" name="Can 45"/>
           <p:cNvSpPr/>
           <p:nvPr/>
         </p:nvSpPr>
         <p:spPr>
           <a:xfrm>
-            <a:off x="8193024" y="1993392"/>
-            <a:ext cx="1417320" cy="1080000"/>
-          </a:xfrm>
-          <a:prstGeom prst="rect">
-            <a:avLst/>
-          </a:prstGeom>
-          <a:solidFill>
-            <a:srgbClr val="140804"/>
-          </a:solidFill>
-          <a:ln w="19050">
-            <a:solidFill>
-              <a:srgbClr val="22CCDD"/>
-            </a:solidFill>
+            <a:off x="6785704" y="2443392"/>
+            <a:ext cx="200000" cy="180000"/>
+          </a:xfrm>
+          <a:prstGeom prst="can">
+            <a:avLst/>
+          </a:prstGeom>
+          <a:solidFill>
+            <a:srgbClr val="FF4400"/>
+          </a:solidFill>
+          <a:ln>
+            <a:noFill/>
           </a:ln>
         </p:spPr>
         <p:style>
@@ -6529,17 +6527,19 @@
         </p:nvSpPr>
         <p:spPr>
           <a:xfrm>
-            <a:off x="8193024" y="1993392"/>
-            <a:ext cx="30000" cy="1080000"/>
-          </a:xfrm>
-          <a:prstGeom prst="rect">
-            <a:avLst/>
-          </a:prstGeom>
-          <a:solidFill>
-            <a:srgbClr val="22CCDD"/>
-          </a:solidFill>
-          <a:ln>
-            <a:noFill/>
+            <a:off x="6931152" y="1993392"/>
+            <a:ext cx="1508760" cy="1080000"/>
+          </a:xfrm>
+          <a:prstGeom prst="rect">
+            <a:avLst/>
+          </a:prstGeom>
+          <a:solidFill>
+            <a:srgbClr val="140804"/>
+          </a:solidFill>
+          <a:ln w="22860">
+            <a:solidFill>
+              <a:srgbClr val="22CCDD"/>
+            </a:solidFill>
           </a:ln>
         </p:spPr>
         <p:style>
@@ -6572,30 +6572,29 @@
         </p:nvSpPr>
         <p:spPr>
           <a:xfrm>
-            <a:off x="8243024" y="2063392"/>
-            <a:ext cx="1188720" cy="310000"/>
-          </a:xfrm>
-          <a:prstGeom prst="rect">
-            <a:avLst/>
-          </a:prstGeom>
-          <a:noFill/>
-        </p:spPr>
-        <p:txBody>
-          <a:bodyPr wrap="square">
-            <a:spAutoFit/>
-          </a:bodyPr>
-          <a:lstStyle/>
-          <a:p>
-            <a:pPr algn="ctr"/>
-            <a:r>
-              <a:rPr sz="900" b="1">
+            <a:off x="6966152" y="2063392"/>
+            <a:ext cx="1448760" cy="370000"/>
+          </a:xfrm>
+          <a:prstGeom prst="rect">
+            <a:avLst/>
+          </a:prstGeom>
+          <a:noFill/>
+        </p:spPr>
+        <p:txBody>
+          <a:bodyPr wrap="square">
+            <a:spAutoFit/>
+          </a:bodyPr>
+          <a:lstStyle/>
+          <a:p>
+            <a:pPr algn="ctr"/>
+            <a:r>
+              <a:rPr sz="950" b="1">
                 <a:solidFill>
                   <a:srgbClr val="22CCDD"/>
                 </a:solidFill>
                 <a:latin typeface="游明朝"/>
               </a:rPr>
-              <a:t>アドラ
-リンク
+              <a:t>アドラリンク
 CZ(3G)</a:t>
             </a:r>
           </a:p>
@@ -6609,8 +6608,8 @@
         </p:nvSpPr>
         <p:spPr>
           <a:xfrm>
-            <a:off x="8243024" y="2483392"/>
-            <a:ext cx="1188720" cy="460000"/>
+            <a:off x="6956152" y="2483392"/>
+            <a:ext cx="1463760" cy="470000"/>
           </a:xfrm>
           <a:prstGeom prst="rect">
             <a:avLst/>
@@ -6627,12 +6626,11 @@
             <a:r>
               <a:rPr sz="750" b="0">
                 <a:solidFill>
-                  <a:srgbClr val="F0ECE8"/>
+                  <a:srgbClr val="998880"/>
                 </a:solidFill>
                 <a:latin typeface="メイリオ"/>
               </a:rPr>
-              <a:t>成功率
-約50%
+              <a:t>成功率約50%
 上乗せ契機</a:t>
             </a:r>
           </a:p>
@@ -6646,7 +6644,7 @@
         </p:nvSpPr>
         <p:spPr>
           <a:xfrm>
-            <a:off x="256032" y="3093392"/>
+            <a:off x="274320" y="3093392"/>
             <a:ext cx="3657600" cy="260000"/>
           </a:xfrm>
           <a:prstGeom prst="rect">
@@ -6681,7 +6679,7 @@
         </p:nvSpPr>
         <p:spPr>
           <a:xfrm>
-            <a:off x="256032" y="3333392"/>
+            <a:off x="274320" y="3333392"/>
             <a:ext cx="4114800" cy="5000"/>
           </a:xfrm>
           <a:prstGeom prst="rect">
